--- a/decks/SEIDOR_Alcance_SAP_Cloud_ERP_Private.pptx
+++ b/decks/SEIDOR_Alcance_SAP_Cloud_ERP_Private.pptx
@@ -2485,7 +2485,7 @@
                 <a:ea typeface="Poppins" pitchFamily="34" charset="-122"/>
                 <a:cs typeface="Poppins" pitchFamily="34" charset="-120"/>
               </a:rPr>
-              <a:t>USD 205,000</a:t>
+              <a:t>USD 378,000</a:t>
             </a:r>
             <a:endParaRPr lang="en-US" sz="1600" dirty="0"/>
           </a:p>
@@ -5400,7 +5400,7 @@
                 <a:ea typeface="Poppins" pitchFamily="34" charset="-122"/>
                 <a:cs typeface="Poppins" pitchFamily="34" charset="-120"/>
               </a:rPr>
-              <a:t>205,000</a:t>
+              <a:t>378,000</a:t>
             </a:r>
             <a:endParaRPr lang="en-US" sz="2600" dirty="0"/>
           </a:p>
